--- a/PYDATA_LONDON_02SEP2025.pptx
+++ b/PYDATA_LONDON_02SEP2025.pptx
@@ -5740,8 +5740,8 @@
         </p:blipFill>
         <p:spPr>
           <a:xfrm>
-            <a:off x="6929457" y="1973376"/>
-            <a:ext cx="4343229" cy="4058427"/>
+            <a:off x="7509889" y="1991819"/>
+            <a:ext cx="4122392" cy="3852071"/>
           </a:xfrm>
           <a:prstGeom prst="rect">
             <a:avLst/>
@@ -5763,7 +5763,7 @@
         <p:spPr>
           <a:xfrm>
             <a:off x="675971" y="2369262"/>
-            <a:ext cx="6147616" cy="3662541"/>
+            <a:ext cx="6413198" cy="4462760"/>
           </a:xfrm>
           <a:prstGeom prst="rect">
             <a:avLst/>
@@ -5777,12 +5777,12 @@
           <a:lstStyle/>
           <a:p>
             <a:r>
-              <a:rPr lang="en-GB" sz="2000" dirty="0"/>
-              <a:t>Given an article title, determine if it is about AI</a:t>
-            </a:r>
-          </a:p>
-          <a:p>
-            <a:endParaRPr lang="en-GB" sz="2000" dirty="0"/>
+              <a:rPr lang="en-GB" sz="2400" dirty="0"/>
+              <a:t>Given an article title, determine if it is about AI.</a:t>
+            </a:r>
+          </a:p>
+          <a:p>
+            <a:endParaRPr lang="en-GB" sz="2400" dirty="0"/>
           </a:p>
           <a:p>
             <a:pPr marL="342900" indent="-342900">
@@ -5790,7 +5790,7 @@
               <a:buAutoNum type="arabicPeriod"/>
             </a:pPr>
             <a:r>
-              <a:rPr lang="en-GB" sz="2000" dirty="0"/>
+              <a:rPr lang="en-GB" sz="2400" dirty="0"/>
               <a:t>Take title and create article of N words (EXPANDER)</a:t>
             </a:r>
           </a:p>
@@ -5800,7 +5800,7 @@
               <a:buAutoNum type="arabicPeriod"/>
             </a:pPr>
             <a:r>
-              <a:rPr lang="en-GB" sz="2000" dirty="0"/>
+              <a:rPr lang="en-GB" sz="2400" dirty="0"/>
               <a:t>In a specified language (TRANSLATOR)</a:t>
             </a:r>
           </a:p>
@@ -5810,7 +5810,7 @@
               <a:buAutoNum type="arabicPeriod"/>
             </a:pPr>
             <a:r>
-              <a:rPr lang="en-GB" sz="2000" dirty="0"/>
+              <a:rPr lang="en-GB" sz="2400" dirty="0"/>
               <a:t>Ensure article is not sensational (EDITOR)</a:t>
             </a:r>
           </a:p>
@@ -5819,11 +5819,11 @@
               <a:buFont typeface="+mj-lt"/>
               <a:buAutoNum type="arabicPeriod"/>
             </a:pPr>
-            <a:endParaRPr lang="en-GB" sz="2000" dirty="0"/>
-          </a:p>
-          <a:p>
-            <a:r>
-              <a:rPr lang="en-GB" sz="2000" dirty="0"/>
+            <a:endParaRPr lang="en-GB" sz="2400" dirty="0"/>
+          </a:p>
+          <a:p>
+            <a:r>
+              <a:rPr lang="en-GB" sz="2400" dirty="0"/>
               <a:t>PUBLISH = YES only if all three are YES</a:t>
             </a:r>
           </a:p>
@@ -6570,23 +6570,7 @@
                   <a:srgbClr val="3A3A3A"/>
                 </a:solidFill>
               </a:rPr>
-              <a:t>We need to draft up guidelines on what an </a:t>
-            </a:r>
-            <a:r>
-              <a:rPr lang="en-GB" sz="3600" dirty="0" err="1">
-                <a:solidFill>
-                  <a:srgbClr val="3A3A3A"/>
-                </a:solidFill>
-              </a:rPr>
-              <a:t>artricle</a:t>
-            </a:r>
-            <a:r>
-              <a:rPr lang="en-GB" sz="3600" dirty="0">
-                <a:solidFill>
-                  <a:srgbClr val="3A3A3A"/>
-                </a:solidFill>
-              </a:rPr>
-              <a:t> should contain, its structure and other ways an article is ‘good’.</a:t>
+              <a:t>We need to draft up guidelines on what an article should contain, its structure and other ways an article is ‘good’.</a:t>
             </a:r>
           </a:p>
           <a:p>
@@ -6609,7 +6593,7 @@
                   <a:srgbClr val="3A3A3A"/>
                 </a:solidFill>
               </a:rPr>
-              <a:t>This exercise further helps our LLM prompt and we refine it.</a:t>
+              <a:t>This exercise further helps our LLM prompt, and we refine it.</a:t>
             </a:r>
             <a:endParaRPr lang="en-GB" sz="3600" dirty="0"/>
           </a:p>
@@ -6746,23 +6730,7 @@
                   <a:srgbClr val="3A3A3A"/>
                 </a:solidFill>
               </a:rPr>
-              <a:t>We need to draft up guidelines on what an </a:t>
-            </a:r>
-            <a:r>
-              <a:rPr lang="en-GB" sz="3600" dirty="0" err="1">
-                <a:solidFill>
-                  <a:srgbClr val="3A3A3A"/>
-                </a:solidFill>
-              </a:rPr>
-              <a:t>artricle</a:t>
-            </a:r>
-            <a:r>
-              <a:rPr lang="en-GB" sz="3600" dirty="0">
-                <a:solidFill>
-                  <a:srgbClr val="3A3A3A"/>
-                </a:solidFill>
-              </a:rPr>
-              <a:t> should contain, its structure and other ways an article is ‘good’.</a:t>
+              <a:t>We need to draft up guidelines on what an article should contain, its structure and other ways an article is ‘good’.</a:t>
             </a:r>
           </a:p>
           <a:p>
@@ -6785,7 +6753,7 @@
                   <a:srgbClr val="3A3A3A"/>
                 </a:solidFill>
               </a:rPr>
-              <a:t>This exercise further helps our prompt and we refine it.</a:t>
+              <a:t>This exercise further helps refine our prompt.</a:t>
             </a:r>
             <a:endParaRPr lang="en-GB" sz="3600" dirty="0"/>
           </a:p>
@@ -7940,7 +7908,7 @@
           <a:p>
             <a:r>
               <a:rPr lang="en-GB" sz="2400" dirty="0"/>
-              <a:t>PUBLISH = YES only if all three are YES in EDITOR</a:t>
+              <a:t>PUBLISH = YES only if last three are YES in EDITOR</a:t>
             </a:r>
           </a:p>
           <a:p>
@@ -9022,28 +8990,12 @@
           <a:lstStyle/>
           <a:p>
             <a:r>
-              <a:rPr lang="en-GB" dirty="0" err="1">
-                <a:solidFill>
-                  <a:srgbClr val="676767"/>
-                </a:solidFill>
-              </a:rPr>
-              <a:t>Whento</a:t>
-            </a:r>
-            <a:r>
-              <a:rPr lang="en-GB">
-                <a:solidFill>
-                  <a:srgbClr val="676767"/>
-                </a:solidFill>
-              </a:rPr>
-              <a:t> use </a:t>
-            </a:r>
-            <a:r>
               <a:rPr lang="en-GB" dirty="0">
                 <a:solidFill>
                   <a:srgbClr val="676767"/>
                 </a:solidFill>
               </a:rPr>
-              <a:t>Evals?</a:t>
+              <a:t>When to use Evals?</a:t>
             </a:r>
           </a:p>
         </p:txBody>
@@ -9610,7 +9562,7 @@
             </a:pPr>
             <a:r>
               <a:rPr lang="en-GB" dirty="0"/>
-              <a:t>You might use or incorporate ready made 3rf party software that is Agentic as in the next slide…Google’s CRM Agent…</a:t>
+              <a:t>You might use or incorporate ready made 3rd party software that is Agentic as in the next slide…Google’s CRM Agent…</a:t>
             </a:r>
           </a:p>
           <a:p>

--- a/PYDATA_LONDON_02SEP2025.pptx
+++ b/PYDATA_LONDON_02SEP2025.pptx
@@ -9,8 +9,8 @@
   </p:notesMasterIdLst>
   <p:sldIdLst>
     <p:sldId id="257" r:id="rId2"/>
-    <p:sldId id="262" r:id="rId3"/>
-    <p:sldId id="287" r:id="rId4"/>
+    <p:sldId id="287" r:id="rId3"/>
+    <p:sldId id="262" r:id="rId4"/>
     <p:sldId id="283" r:id="rId5"/>
     <p:sldId id="266" r:id="rId6"/>
     <p:sldId id="289" r:id="rId7"/>
@@ -5763,7 +5763,7 @@
         <p:spPr>
           <a:xfrm>
             <a:off x="675971" y="2369262"/>
-            <a:ext cx="6413198" cy="4462760"/>
+            <a:ext cx="6413198" cy="3970318"/>
           </a:xfrm>
           <a:prstGeom prst="rect">
             <a:avLst/>
@@ -5829,12 +5829,6 @@
           </a:p>
           <a:p>
             <a:endParaRPr lang="en-GB" sz="2400" i="1" dirty="0"/>
-          </a:p>
-          <a:p>
-            <a:r>
-              <a:rPr lang="en-GB" sz="3200" i="1" dirty="0"/>
-              <a:t>Let’s go to the guide and code…</a:t>
-            </a:r>
           </a:p>
           <a:p>
             <a:endParaRPr lang="en-GB" dirty="0"/>
@@ -6961,7 +6955,7 @@
         <p:cNvPr id="1" name="">
           <a:extLst>
             <a:ext uri="{FF2B5EF4-FFF2-40B4-BE49-F238E27FC236}">
-              <a16:creationId xmlns:a16="http://schemas.microsoft.com/office/drawing/2014/main" id="{3B3CAD92-64A2-9E64-259C-D0FEF3A00383}"/>
+              <a16:creationId xmlns:a16="http://schemas.microsoft.com/office/drawing/2014/main" id="{FF357D8D-75A6-7D51-8D6A-0577ACB955CF}"/>
             </a:ext>
           </a:extLst>
         </p:cNvPr>
@@ -6981,7 +6975,7 @@
           <p:cNvPr id="2" name="Title 1">
             <a:extLst>
               <a:ext uri="{FF2B5EF4-FFF2-40B4-BE49-F238E27FC236}">
-                <a16:creationId xmlns:a16="http://schemas.microsoft.com/office/drawing/2014/main" id="{36969965-CBD5-3274-6734-01C0F3F1DE75}"/>
+                <a16:creationId xmlns:a16="http://schemas.microsoft.com/office/drawing/2014/main" id="{17F2B0CC-EE48-6084-A4EA-5B5D152A8A2B}"/>
               </a:ext>
             </a:extLst>
           </p:cNvPr>
@@ -7003,18 +6997,13 @@
           <a:lstStyle/>
           <a:p>
             <a:r>
-              <a:rPr lang="en-GB">
+              <a:rPr lang="en-GB" dirty="0">
                 <a:solidFill>
                   <a:srgbClr val="676767"/>
                 </a:solidFill>
               </a:rPr>
-              <a:t>About me</a:t>
-            </a:r>
-            <a:endParaRPr lang="en-GB" dirty="0">
-              <a:solidFill>
-                <a:srgbClr val="676767"/>
-              </a:solidFill>
-            </a:endParaRPr>
+              <a:t>My desired outcome</a:t>
+            </a:r>
           </a:p>
         </p:txBody>
       </p:sp>
@@ -7023,7 +7012,7 @@
           <p:cNvPr id="3" name="Content Placeholder 2">
             <a:extLst>
               <a:ext uri="{FF2B5EF4-FFF2-40B4-BE49-F238E27FC236}">
-                <a16:creationId xmlns:a16="http://schemas.microsoft.com/office/drawing/2014/main" id="{FA6ED4D5-40EE-1AD6-45EB-5319021B107B}"/>
+                <a16:creationId xmlns:a16="http://schemas.microsoft.com/office/drawing/2014/main" id="{02C99520-102A-F40A-3D72-928418B9CD25}"/>
               </a:ext>
             </a:extLst>
           </p:cNvPr>
@@ -7036,8 +7025,8 @@
         </p:nvSpPr>
         <p:spPr>
           <a:xfrm>
-            <a:off x="878756" y="1306963"/>
-            <a:ext cx="10596715" cy="5013125"/>
+            <a:off x="919314" y="1413031"/>
+            <a:ext cx="10596715" cy="4906652"/>
           </a:xfrm>
           <a:solidFill>
             <a:srgbClr val="FAF0E6"/>
@@ -7050,260 +7039,91 @@
           <a:lstStyle/>
           <a:p>
             <a:pPr marL="0" indent="0">
+              <a:lnSpc>
+                <a:spcPts val="4500"/>
+              </a:lnSpc>
               <a:buNone/>
             </a:pPr>
-            <a:endParaRPr lang="en-GB"/>
+            <a:r>
+              <a:rPr lang="en-GB" sz="4000" dirty="0"/>
+              <a:t>Not for you to fully understand Evals</a:t>
+            </a:r>
           </a:p>
           <a:p>
             <a:pPr marL="0" indent="0">
+              <a:lnSpc>
+                <a:spcPts val="4500"/>
+              </a:lnSpc>
               <a:buNone/>
             </a:pPr>
-            <a:endParaRPr lang="en-GB"/>
+            <a:r>
+              <a:rPr lang="en-GB" sz="4000" i="1" dirty="0"/>
+              <a:t>But…</a:t>
+            </a:r>
+          </a:p>
+          <a:p>
+            <a:pPr marL="0" indent="0" algn="ctr">
+              <a:lnSpc>
+                <a:spcPts val="4500"/>
+              </a:lnSpc>
+              <a:buNone/>
+            </a:pPr>
+            <a:r>
+              <a:rPr lang="en-GB" sz="3600" i="1" dirty="0"/>
+              <a:t>That Evals are doable</a:t>
+            </a:r>
+          </a:p>
+          <a:p>
+            <a:pPr marL="0" indent="0" algn="ctr">
+              <a:lnSpc>
+                <a:spcPts val="4500"/>
+              </a:lnSpc>
+              <a:buNone/>
+            </a:pPr>
+            <a:r>
+              <a:rPr lang="en-GB" sz="3600" i="1" dirty="0"/>
+              <a:t>There are useful resources available for you</a:t>
+            </a:r>
+          </a:p>
+          <a:p>
+            <a:pPr marL="0" indent="0" algn="ctr">
+              <a:lnSpc>
+                <a:spcPts val="4500"/>
+              </a:lnSpc>
+              <a:buNone/>
+            </a:pPr>
+            <a:r>
+              <a:rPr lang="en-GB" sz="3600" i="1" dirty="0"/>
+              <a:t>Demystify and simplify what an Agent is</a:t>
+            </a:r>
           </a:p>
           <a:p>
             <a:pPr marL="0" indent="0">
+              <a:lnSpc>
+                <a:spcPts val="4500"/>
+              </a:lnSpc>
               <a:buNone/>
             </a:pPr>
-            <a:endParaRPr lang="en-GB"/>
-          </a:p>
-          <a:p>
-            <a:pPr marL="0" indent="0">
+            <a:r>
+              <a:rPr lang="en-GB" sz="3600" dirty="0"/>
+              <a:t>There will be some slides and then dive into code and manual (website).</a:t>
+            </a:r>
+          </a:p>
+          <a:p>
+            <a:pPr marL="0" indent="0" algn="ctr">
+              <a:lnSpc>
+                <a:spcPts val="4500"/>
+              </a:lnSpc>
               <a:buNone/>
             </a:pPr>
-            <a:endParaRPr lang="en-GB"/>
-          </a:p>
-          <a:p>
-            <a:pPr marL="0" indent="0">
-              <a:buNone/>
-            </a:pPr>
-            <a:endParaRPr lang="en-GB"/>
-          </a:p>
-          <a:p>
-            <a:pPr marL="0" indent="0">
-              <a:buNone/>
-            </a:pPr>
-            <a:endParaRPr lang="en-GB" dirty="0"/>
-          </a:p>
-        </p:txBody>
-      </p:sp>
-      <p:pic>
-        <p:nvPicPr>
-          <p:cNvPr id="5" name="Picture 4" descr="A close-up of a machine&#10;&#10;AI-generated content may be incorrect.">
-            <a:extLst>
-              <a:ext uri="{FF2B5EF4-FFF2-40B4-BE49-F238E27FC236}">
-                <a16:creationId xmlns:a16="http://schemas.microsoft.com/office/drawing/2014/main" id="{F3C50833-41C6-6D1F-F30A-524D489332FD}"/>
-              </a:ext>
-            </a:extLst>
-          </p:cNvPr>
-          <p:cNvPicPr>
-            <a:picLocks noChangeAspect="1"/>
-          </p:cNvPicPr>
-          <p:nvPr/>
-        </p:nvPicPr>
-        <p:blipFill>
-          <a:blip r:embed="rId2">
-            <a:extLst>
-              <a:ext uri="{28A0092B-C50C-407E-A947-70E740481C1C}">
-                <a14:useLocalDpi xmlns:a14="http://schemas.microsoft.com/office/drawing/2010/main" val="0"/>
-              </a:ext>
-            </a:extLst>
-          </a:blip>
-          <a:stretch>
-            <a:fillRect/>
-          </a:stretch>
-        </p:blipFill>
-        <p:spPr>
-          <a:xfrm>
-            <a:off x="8116584" y="1328814"/>
-            <a:ext cx="3689634" cy="2767226"/>
-          </a:xfrm>
-          <a:prstGeom prst="rect">
-            <a:avLst/>
-          </a:prstGeom>
-        </p:spPr>
-      </p:pic>
-      <p:pic>
-        <p:nvPicPr>
-          <p:cNvPr id="7" name="Picture 6" descr="A dog sitting on grass&#10;&#10;AI-generated content may be incorrect.">
-            <a:extLst>
-              <a:ext uri="{FF2B5EF4-FFF2-40B4-BE49-F238E27FC236}">
-                <a16:creationId xmlns:a16="http://schemas.microsoft.com/office/drawing/2014/main" id="{C72068A3-9DA4-4572-DE52-739BD2F63608}"/>
-              </a:ext>
-            </a:extLst>
-          </p:cNvPr>
-          <p:cNvPicPr>
-            <a:picLocks noChangeAspect="1"/>
-          </p:cNvPicPr>
-          <p:nvPr/>
-        </p:nvPicPr>
-        <p:blipFill>
-          <a:blip r:embed="rId3">
-            <a:extLst>
-              <a:ext uri="{28A0092B-C50C-407E-A947-70E740481C1C}">
-                <a14:useLocalDpi xmlns:a14="http://schemas.microsoft.com/office/drawing/2010/main" val="0"/>
-              </a:ext>
-            </a:extLst>
-          </a:blip>
-          <a:stretch>
-            <a:fillRect/>
-          </a:stretch>
-        </p:blipFill>
-        <p:spPr>
-          <a:xfrm>
-            <a:off x="4032947" y="1328815"/>
-            <a:ext cx="1717803" cy="2761035"/>
-          </a:xfrm>
-          <a:prstGeom prst="rect">
-            <a:avLst/>
-          </a:prstGeom>
-        </p:spPr>
-      </p:pic>
-      <p:pic>
-        <p:nvPicPr>
-          <p:cNvPr id="9" name="Picture 8" descr="A dog walking on the street&#10;&#10;AI-generated content may be incorrect.">
-            <a:extLst>
-              <a:ext uri="{FF2B5EF4-FFF2-40B4-BE49-F238E27FC236}">
-                <a16:creationId xmlns:a16="http://schemas.microsoft.com/office/drawing/2014/main" id="{D9040783-80F7-1202-94D3-180CF27290FA}"/>
-              </a:ext>
-            </a:extLst>
-          </p:cNvPr>
-          <p:cNvPicPr>
-            <a:picLocks noChangeAspect="1"/>
-          </p:cNvPicPr>
-          <p:nvPr/>
-        </p:nvPicPr>
-        <p:blipFill>
-          <a:blip r:embed="rId4">
-            <a:extLst>
-              <a:ext uri="{28A0092B-C50C-407E-A947-70E740481C1C}">
-                <a14:useLocalDpi xmlns:a14="http://schemas.microsoft.com/office/drawing/2010/main" val="0"/>
-              </a:ext>
-            </a:extLst>
-          </a:blip>
-          <a:stretch>
-            <a:fillRect/>
-          </a:stretch>
-        </p:blipFill>
-        <p:spPr>
-          <a:xfrm rot="5400000">
-            <a:off x="5497856" y="1673943"/>
-            <a:ext cx="2761035" cy="2070777"/>
-          </a:xfrm>
-          <a:prstGeom prst="rect">
-            <a:avLst/>
-          </a:prstGeom>
-        </p:spPr>
-      </p:pic>
-      <p:pic>
-        <p:nvPicPr>
-          <p:cNvPr id="11" name="Picture 10">
-            <a:extLst>
-              <a:ext uri="{FF2B5EF4-FFF2-40B4-BE49-F238E27FC236}">
-                <a16:creationId xmlns:a16="http://schemas.microsoft.com/office/drawing/2014/main" id="{2DCAABF9-7D6A-30DB-DFA8-35DA30991B03}"/>
-              </a:ext>
-            </a:extLst>
-          </p:cNvPr>
-          <p:cNvPicPr>
-            <a:picLocks noChangeAspect="1"/>
-          </p:cNvPicPr>
-          <p:nvPr/>
-        </p:nvPicPr>
-        <p:blipFill>
-          <a:blip r:embed="rId5">
-            <a:extLst>
-              <a:ext uri="{28A0092B-C50C-407E-A947-70E740481C1C}">
-                <a14:useLocalDpi xmlns:a14="http://schemas.microsoft.com/office/drawing/2010/main" val="0"/>
-              </a:ext>
-            </a:extLst>
-          </a:blip>
-          <a:srcRect/>
-          <a:stretch/>
-        </p:blipFill>
-        <p:spPr>
-          <a:xfrm>
-            <a:off x="5388949" y="4111886"/>
-            <a:ext cx="6417269" cy="2555464"/>
-          </a:xfrm>
-          <a:prstGeom prst="rect">
-            <a:avLst/>
-          </a:prstGeom>
-        </p:spPr>
-      </p:pic>
-      <p:pic>
-        <p:nvPicPr>
-          <p:cNvPr id="13" name="Picture 12">
-            <a:extLst>
-              <a:ext uri="{FF2B5EF4-FFF2-40B4-BE49-F238E27FC236}">
-                <a16:creationId xmlns:a16="http://schemas.microsoft.com/office/drawing/2014/main" id="{6AD9A928-8A3F-EBB4-94C3-AF298183888F}"/>
-              </a:ext>
-            </a:extLst>
-          </p:cNvPr>
-          <p:cNvPicPr>
-            <a:picLocks noChangeAspect="1"/>
-          </p:cNvPicPr>
-          <p:nvPr/>
-        </p:nvPicPr>
-        <p:blipFill>
-          <a:blip r:embed="rId6">
-            <a:extLst>
-              <a:ext uri="{28A0092B-C50C-407E-A947-70E740481C1C}">
-                <a14:useLocalDpi xmlns:a14="http://schemas.microsoft.com/office/drawing/2010/main" val="0"/>
-              </a:ext>
-            </a:extLst>
-          </a:blip>
-          <a:srcRect/>
-          <a:stretch/>
-        </p:blipFill>
-        <p:spPr>
-          <a:xfrm>
-            <a:off x="919314" y="1306963"/>
-            <a:ext cx="2782886" cy="2782886"/>
-          </a:xfrm>
-          <a:prstGeom prst="rect">
-            <a:avLst/>
-          </a:prstGeom>
-        </p:spPr>
-      </p:pic>
-      <p:pic>
-        <p:nvPicPr>
-          <p:cNvPr id="6" name="Picture 5" descr="A map with a blue line&#10;&#10;AI-generated content may be incorrect.">
-            <a:extLst>
-              <a:ext uri="{FF2B5EF4-FFF2-40B4-BE49-F238E27FC236}">
-                <a16:creationId xmlns:a16="http://schemas.microsoft.com/office/drawing/2014/main" id="{7D83FFC6-2FA8-C2C7-700A-439FA99538C8}"/>
-              </a:ext>
-            </a:extLst>
-          </p:cNvPr>
-          <p:cNvPicPr>
-            <a:picLocks noChangeAspect="1"/>
-          </p:cNvPicPr>
-          <p:nvPr/>
-        </p:nvPicPr>
-        <p:blipFill>
-          <a:blip r:embed="rId7">
-            <a:extLst>
-              <a:ext uri="{28A0092B-C50C-407E-A947-70E740481C1C}">
-                <a14:useLocalDpi xmlns:a14="http://schemas.microsoft.com/office/drawing/2010/main" val="0"/>
-              </a:ext>
-            </a:extLst>
-          </a:blip>
-          <a:stretch>
-            <a:fillRect/>
-          </a:stretch>
-        </p:blipFill>
-        <p:spPr>
-          <a:xfrm>
-            <a:off x="919314" y="4187833"/>
-            <a:ext cx="3223615" cy="2479703"/>
-          </a:xfrm>
-          <a:prstGeom prst="rect">
-            <a:avLst/>
-          </a:prstGeom>
-        </p:spPr>
-      </p:pic>
+            <a:endParaRPr lang="en-GB" sz="3600" i="1" dirty="0"/>
+          </a:p>
+        </p:txBody>
+      </p:sp>
     </p:spTree>
     <p:extLst>
       <p:ext uri="{BB962C8B-B14F-4D97-AF65-F5344CB8AC3E}">
-        <p14:creationId xmlns:p14="http://schemas.microsoft.com/office/powerpoint/2010/main" val="2700586660"/>
+        <p14:creationId xmlns:p14="http://schemas.microsoft.com/office/powerpoint/2010/main" val="3305599937"/>
       </p:ext>
     </p:extLst>
   </p:cSld>
@@ -7811,8 +7631,8 @@
         </p:blipFill>
         <p:spPr>
           <a:xfrm>
-            <a:off x="9080787" y="1591996"/>
-            <a:ext cx="2779727" cy="2597450"/>
+            <a:off x="7444321" y="2503499"/>
+            <a:ext cx="4452210" cy="4160262"/>
           </a:xfrm>
           <a:prstGeom prst="rect">
             <a:avLst/>
@@ -7833,7 +7653,7 @@
         </p:nvSpPr>
         <p:spPr>
           <a:xfrm>
-            <a:off x="675971" y="1729054"/>
+            <a:off x="675971" y="1324527"/>
             <a:ext cx="8113466" cy="4832092"/>
           </a:xfrm>
           <a:prstGeom prst="rect">
@@ -8427,7 +8247,7 @@
         <p:cNvPr id="1" name="">
           <a:extLst>
             <a:ext uri="{FF2B5EF4-FFF2-40B4-BE49-F238E27FC236}">
-              <a16:creationId xmlns:a16="http://schemas.microsoft.com/office/drawing/2014/main" id="{FF357D8D-75A6-7D51-8D6A-0577ACB955CF}"/>
+              <a16:creationId xmlns:a16="http://schemas.microsoft.com/office/drawing/2014/main" id="{3B3CAD92-64A2-9E64-259C-D0FEF3A00383}"/>
             </a:ext>
           </a:extLst>
         </p:cNvPr>
@@ -8447,7 +8267,7 @@
           <p:cNvPr id="2" name="Title 1">
             <a:extLst>
               <a:ext uri="{FF2B5EF4-FFF2-40B4-BE49-F238E27FC236}">
-                <a16:creationId xmlns:a16="http://schemas.microsoft.com/office/drawing/2014/main" id="{17F2B0CC-EE48-6084-A4EA-5B5D152A8A2B}"/>
+                <a16:creationId xmlns:a16="http://schemas.microsoft.com/office/drawing/2014/main" id="{36969965-CBD5-3274-6734-01C0F3F1DE75}"/>
               </a:ext>
             </a:extLst>
           </p:cNvPr>
@@ -8469,13 +8289,18 @@
           <a:lstStyle/>
           <a:p>
             <a:r>
-              <a:rPr lang="en-GB" dirty="0">
+              <a:rPr lang="en-GB">
                 <a:solidFill>
                   <a:srgbClr val="676767"/>
                 </a:solidFill>
               </a:rPr>
-              <a:t>My desired outcome</a:t>
-            </a:r>
+              <a:t>About me</a:t>
+            </a:r>
+            <a:endParaRPr lang="en-GB" dirty="0">
+              <a:solidFill>
+                <a:srgbClr val="676767"/>
+              </a:solidFill>
+            </a:endParaRPr>
           </a:p>
         </p:txBody>
       </p:sp>
@@ -8484,7 +8309,7 @@
           <p:cNvPr id="3" name="Content Placeholder 2">
             <a:extLst>
               <a:ext uri="{FF2B5EF4-FFF2-40B4-BE49-F238E27FC236}">
-                <a16:creationId xmlns:a16="http://schemas.microsoft.com/office/drawing/2014/main" id="{02C99520-102A-F40A-3D72-928418B9CD25}"/>
+                <a16:creationId xmlns:a16="http://schemas.microsoft.com/office/drawing/2014/main" id="{FA6ED4D5-40EE-1AD6-45EB-5319021B107B}"/>
               </a:ext>
             </a:extLst>
           </p:cNvPr>
@@ -8497,8 +8322,8 @@
         </p:nvSpPr>
         <p:spPr>
           <a:xfrm>
-            <a:off x="919314" y="1413031"/>
-            <a:ext cx="10596715" cy="4906652"/>
+            <a:off x="878756" y="1306963"/>
+            <a:ext cx="10596715" cy="5013125"/>
           </a:xfrm>
           <a:solidFill>
             <a:srgbClr val="FAF0E6"/>
@@ -8511,79 +8336,258 @@
           <a:lstStyle/>
           <a:p>
             <a:pPr marL="0" indent="0">
-              <a:lnSpc>
-                <a:spcPts val="4500"/>
-              </a:lnSpc>
               <a:buNone/>
             </a:pPr>
-            <a:r>
-              <a:rPr lang="en-GB" sz="4000" dirty="0"/>
-              <a:t>Not for you to fully understand Evals</a:t>
-            </a:r>
+            <a:endParaRPr lang="en-GB"/>
           </a:p>
           <a:p>
             <a:pPr marL="0" indent="0">
-              <a:lnSpc>
-                <a:spcPts val="4500"/>
-              </a:lnSpc>
               <a:buNone/>
             </a:pPr>
-            <a:r>
-              <a:rPr lang="en-GB" sz="4000" i="1" dirty="0"/>
-              <a:t>But…</a:t>
-            </a:r>
-          </a:p>
-          <a:p>
-            <a:pPr marL="0" indent="0" algn="ctr">
-              <a:lnSpc>
-                <a:spcPts val="4500"/>
-              </a:lnSpc>
+            <a:endParaRPr lang="en-GB"/>
+          </a:p>
+          <a:p>
+            <a:pPr marL="0" indent="0">
               <a:buNone/>
             </a:pPr>
-            <a:r>
-              <a:rPr lang="en-GB" sz="3600" i="1" dirty="0"/>
-              <a:t>That Evals are doable</a:t>
-            </a:r>
-          </a:p>
-          <a:p>
-            <a:pPr marL="0" indent="0" algn="ctr">
-              <a:lnSpc>
-                <a:spcPts val="4500"/>
-              </a:lnSpc>
+            <a:endParaRPr lang="en-GB"/>
+          </a:p>
+          <a:p>
+            <a:pPr marL="0" indent="0">
               <a:buNone/>
             </a:pPr>
-            <a:r>
-              <a:rPr lang="en-GB" sz="3600" i="1" dirty="0"/>
-              <a:t>There are useful resources available for you</a:t>
-            </a:r>
-          </a:p>
-          <a:p>
-            <a:pPr marL="0" indent="0" algn="ctr">
-              <a:lnSpc>
-                <a:spcPts val="4500"/>
-              </a:lnSpc>
+            <a:endParaRPr lang="en-GB"/>
+          </a:p>
+          <a:p>
+            <a:pPr marL="0" indent="0">
               <a:buNone/>
             </a:pPr>
-            <a:r>
-              <a:rPr lang="en-GB" sz="3600" i="1" dirty="0"/>
-              <a:t>Demystify and simplify what an Agent is</a:t>
-            </a:r>
-          </a:p>
-          <a:p>
-            <a:pPr marL="0" indent="0" algn="ctr">
-              <a:lnSpc>
-                <a:spcPts val="4500"/>
-              </a:lnSpc>
+            <a:endParaRPr lang="en-GB"/>
+          </a:p>
+          <a:p>
+            <a:pPr marL="0" indent="0">
               <a:buNone/>
             </a:pPr>
-            <a:endParaRPr lang="en-GB" sz="3600" i="1" dirty="0"/>
-          </a:p>
-        </p:txBody>
-      </p:sp>
+            <a:endParaRPr lang="en-GB" dirty="0"/>
+          </a:p>
+        </p:txBody>
+      </p:sp>
+      <p:pic>
+        <p:nvPicPr>
+          <p:cNvPr id="5" name="Picture 4" descr="A close-up of a machine&#10;&#10;AI-generated content may be incorrect.">
+            <a:extLst>
+              <a:ext uri="{FF2B5EF4-FFF2-40B4-BE49-F238E27FC236}">
+                <a16:creationId xmlns:a16="http://schemas.microsoft.com/office/drawing/2014/main" id="{F3C50833-41C6-6D1F-F30A-524D489332FD}"/>
+              </a:ext>
+            </a:extLst>
+          </p:cNvPr>
+          <p:cNvPicPr>
+            <a:picLocks noChangeAspect="1"/>
+          </p:cNvPicPr>
+          <p:nvPr/>
+        </p:nvPicPr>
+        <p:blipFill>
+          <a:blip r:embed="rId2">
+            <a:extLst>
+              <a:ext uri="{28A0092B-C50C-407E-A947-70E740481C1C}">
+                <a14:useLocalDpi xmlns:a14="http://schemas.microsoft.com/office/drawing/2010/main" val="0"/>
+              </a:ext>
+            </a:extLst>
+          </a:blip>
+          <a:stretch>
+            <a:fillRect/>
+          </a:stretch>
+        </p:blipFill>
+        <p:spPr>
+          <a:xfrm>
+            <a:off x="8116584" y="1248913"/>
+            <a:ext cx="3689634" cy="2767226"/>
+          </a:xfrm>
+          <a:prstGeom prst="rect">
+            <a:avLst/>
+          </a:prstGeom>
+        </p:spPr>
+      </p:pic>
+      <p:pic>
+        <p:nvPicPr>
+          <p:cNvPr id="7" name="Picture 6">
+            <a:extLst>
+              <a:ext uri="{FF2B5EF4-FFF2-40B4-BE49-F238E27FC236}">
+                <a16:creationId xmlns:a16="http://schemas.microsoft.com/office/drawing/2014/main" id="{C72068A3-9DA4-4572-DE52-739BD2F63608}"/>
+              </a:ext>
+            </a:extLst>
+          </p:cNvPr>
+          <p:cNvPicPr>
+            <a:picLocks noChangeAspect="1"/>
+          </p:cNvPicPr>
+          <p:nvPr/>
+        </p:nvPicPr>
+        <p:blipFill>
+          <a:blip r:embed="rId3">
+            <a:extLst>
+              <a:ext uri="{28A0092B-C50C-407E-A947-70E740481C1C}">
+                <a14:useLocalDpi xmlns:a14="http://schemas.microsoft.com/office/drawing/2010/main" val="0"/>
+              </a:ext>
+            </a:extLst>
+          </a:blip>
+          <a:srcRect/>
+          <a:stretch/>
+        </p:blipFill>
+        <p:spPr>
+          <a:xfrm>
+            <a:off x="4032947" y="1337937"/>
+            <a:ext cx="1717803" cy="2742790"/>
+          </a:xfrm>
+          <a:prstGeom prst="rect">
+            <a:avLst/>
+          </a:prstGeom>
+        </p:spPr>
+      </p:pic>
+      <p:pic>
+        <p:nvPicPr>
+          <p:cNvPr id="9" name="Picture 8">
+            <a:extLst>
+              <a:ext uri="{FF2B5EF4-FFF2-40B4-BE49-F238E27FC236}">
+                <a16:creationId xmlns:a16="http://schemas.microsoft.com/office/drawing/2014/main" id="{D9040783-80F7-1202-94D3-180CF27290FA}"/>
+              </a:ext>
+            </a:extLst>
+          </p:cNvPr>
+          <p:cNvPicPr>
+            <a:picLocks noChangeAspect="1"/>
+          </p:cNvPicPr>
+          <p:nvPr/>
+        </p:nvPicPr>
+        <p:blipFill>
+          <a:blip r:embed="rId4">
+            <a:extLst>
+              <a:ext uri="{28A0092B-C50C-407E-A947-70E740481C1C}">
+                <a14:useLocalDpi xmlns:a14="http://schemas.microsoft.com/office/drawing/2010/main" val="0"/>
+              </a:ext>
+            </a:extLst>
+          </a:blip>
+          <a:srcRect/>
+          <a:stretch/>
+        </p:blipFill>
+        <p:spPr>
+          <a:xfrm>
+            <a:off x="5921733" y="1367823"/>
+            <a:ext cx="2023867" cy="2683017"/>
+          </a:xfrm>
+          <a:prstGeom prst="rect">
+            <a:avLst/>
+          </a:prstGeom>
+        </p:spPr>
+      </p:pic>
+      <p:pic>
+        <p:nvPicPr>
+          <p:cNvPr id="11" name="Picture 10">
+            <a:extLst>
+              <a:ext uri="{FF2B5EF4-FFF2-40B4-BE49-F238E27FC236}">
+                <a16:creationId xmlns:a16="http://schemas.microsoft.com/office/drawing/2014/main" id="{2DCAABF9-7D6A-30DB-DFA8-35DA30991B03}"/>
+              </a:ext>
+            </a:extLst>
+          </p:cNvPr>
+          <p:cNvPicPr>
+            <a:picLocks noChangeAspect="1"/>
+          </p:cNvPicPr>
+          <p:nvPr/>
+        </p:nvPicPr>
+        <p:blipFill>
+          <a:blip r:embed="rId5">
+            <a:extLst>
+              <a:ext uri="{28A0092B-C50C-407E-A947-70E740481C1C}">
+                <a14:useLocalDpi xmlns:a14="http://schemas.microsoft.com/office/drawing/2010/main" val="0"/>
+              </a:ext>
+            </a:extLst>
+          </a:blip>
+          <a:srcRect/>
+          <a:stretch/>
+        </p:blipFill>
+        <p:spPr>
+          <a:xfrm>
+            <a:off x="5388949" y="4111886"/>
+            <a:ext cx="6417269" cy="2555464"/>
+          </a:xfrm>
+          <a:prstGeom prst="rect">
+            <a:avLst/>
+          </a:prstGeom>
+        </p:spPr>
+      </p:pic>
+      <p:pic>
+        <p:nvPicPr>
+          <p:cNvPr id="13" name="Picture 12">
+            <a:extLst>
+              <a:ext uri="{FF2B5EF4-FFF2-40B4-BE49-F238E27FC236}">
+                <a16:creationId xmlns:a16="http://schemas.microsoft.com/office/drawing/2014/main" id="{6AD9A928-8A3F-EBB4-94C3-AF298183888F}"/>
+              </a:ext>
+            </a:extLst>
+          </p:cNvPr>
+          <p:cNvPicPr>
+            <a:picLocks noChangeAspect="1"/>
+          </p:cNvPicPr>
+          <p:nvPr/>
+        </p:nvPicPr>
+        <p:blipFill>
+          <a:blip r:embed="rId6">
+            <a:extLst>
+              <a:ext uri="{28A0092B-C50C-407E-A947-70E740481C1C}">
+                <a14:useLocalDpi xmlns:a14="http://schemas.microsoft.com/office/drawing/2010/main" val="0"/>
+              </a:ext>
+            </a:extLst>
+          </a:blip>
+          <a:srcRect/>
+          <a:stretch/>
+        </p:blipFill>
+        <p:spPr>
+          <a:xfrm>
+            <a:off x="919314" y="1306963"/>
+            <a:ext cx="2782886" cy="2782886"/>
+          </a:xfrm>
+          <a:prstGeom prst="rect">
+            <a:avLst/>
+          </a:prstGeom>
+        </p:spPr>
+      </p:pic>
+      <p:pic>
+        <p:nvPicPr>
+          <p:cNvPr id="6" name="Picture 5" descr="A map with a blue line&#10;&#10;AI-generated content may be incorrect.">
+            <a:extLst>
+              <a:ext uri="{FF2B5EF4-FFF2-40B4-BE49-F238E27FC236}">
+                <a16:creationId xmlns:a16="http://schemas.microsoft.com/office/drawing/2014/main" id="{7D83FFC6-2FA8-C2C7-700A-439FA99538C8}"/>
+              </a:ext>
+            </a:extLst>
+          </p:cNvPr>
+          <p:cNvPicPr>
+            <a:picLocks noChangeAspect="1"/>
+          </p:cNvPicPr>
+          <p:nvPr/>
+        </p:nvPicPr>
+        <p:blipFill>
+          <a:blip r:embed="rId7">
+            <a:extLst>
+              <a:ext uri="{28A0092B-C50C-407E-A947-70E740481C1C}">
+                <a14:useLocalDpi xmlns:a14="http://schemas.microsoft.com/office/drawing/2010/main" val="0"/>
+              </a:ext>
+            </a:extLst>
+          </a:blip>
+          <a:stretch>
+            <a:fillRect/>
+          </a:stretch>
+        </p:blipFill>
+        <p:spPr>
+          <a:xfrm>
+            <a:off x="919314" y="4187833"/>
+            <a:ext cx="3223615" cy="2479703"/>
+          </a:xfrm>
+          <a:prstGeom prst="rect">
+            <a:avLst/>
+          </a:prstGeom>
+        </p:spPr>
+      </p:pic>
     </p:spTree>
     <p:extLst>
       <p:ext uri="{BB962C8B-B14F-4D97-AF65-F5344CB8AC3E}">
-        <p14:creationId xmlns:p14="http://schemas.microsoft.com/office/powerpoint/2010/main" val="3305599937"/>
+        <p14:creationId xmlns:p14="http://schemas.microsoft.com/office/powerpoint/2010/main" val="2700586660"/>
       </p:ext>
     </p:extLst>
   </p:cSld>

--- a/PYDATA_LONDON_02SEP2025.pptx
+++ b/PYDATA_LONDON_02SEP2025.pptx
@@ -5,7 +5,7 @@
     <p:sldMasterId id="2147483648" r:id="rId1"/>
   </p:sldMasterIdLst>
   <p:notesMasterIdLst>
-    <p:notesMasterId r:id="rId26"/>
+    <p:notesMasterId r:id="rId25"/>
   </p:notesMasterIdLst>
   <p:sldIdLst>
     <p:sldId id="257" r:id="rId2"/>
@@ -25,13 +25,12 @@
     <p:sldId id="291" r:id="rId16"/>
     <p:sldId id="292" r:id="rId17"/>
     <p:sldId id="293" r:id="rId18"/>
-    <p:sldId id="295" r:id="rId19"/>
-    <p:sldId id="296" r:id="rId20"/>
-    <p:sldId id="297" r:id="rId21"/>
-    <p:sldId id="298" r:id="rId22"/>
-    <p:sldId id="300" r:id="rId23"/>
-    <p:sldId id="290" r:id="rId24"/>
-    <p:sldId id="286" r:id="rId25"/>
+    <p:sldId id="296" r:id="rId19"/>
+    <p:sldId id="297" r:id="rId20"/>
+    <p:sldId id="298" r:id="rId21"/>
+    <p:sldId id="300" r:id="rId22"/>
+    <p:sldId id="290" r:id="rId23"/>
+    <p:sldId id="286" r:id="rId24"/>
   </p:sldIdLst>
   <p:sldSz cx="12192000" cy="6858000"/>
   <p:notesSz cx="6858000" cy="9144000"/>
@@ -5299,6 +5298,17 @@
               <a:t> it has provided – we will run it on our box and send the extra context/information.</a:t>
             </a:r>
           </a:p>
+          <a:p>
+            <a:pPr>
+              <a:lnSpc>
+                <a:spcPts val="3000"/>
+              </a:lnSpc>
+            </a:pPr>
+            <a:r>
+              <a:rPr lang="en-GB" dirty="0"/>
+              <a:t>The API is STATELESS – we must pass all the information it needs every time as if it was the first time.</a:t>
+            </a:r>
+          </a:p>
         </p:txBody>
       </p:sp>
     </p:spTree>
@@ -5377,7 +5387,7 @@
                   <a:srgbClr val="676767"/>
                 </a:solidFill>
               </a:rPr>
-              <a:t>180 degree shift</a:t>
+              <a:t>180-degree shift</a:t>
             </a:r>
           </a:p>
         </p:txBody>
@@ -5763,7 +5773,7 @@
         <p:spPr>
           <a:xfrm>
             <a:off x="675971" y="2369262"/>
-            <a:ext cx="6413198" cy="3970318"/>
+            <a:ext cx="6413198" cy="4339650"/>
           </a:xfrm>
           <a:prstGeom prst="rect">
             <a:avLst/>
@@ -5829,6 +5839,12 @@
           </a:p>
           <a:p>
             <a:endParaRPr lang="en-GB" sz="2400" i="1" dirty="0"/>
+          </a:p>
+          <a:p>
+            <a:r>
+              <a:rPr lang="en-GB" sz="2400" i="1" dirty="0"/>
+              <a:t>This app could be a leaf of a larger app.</a:t>
+            </a:r>
           </a:p>
           <a:p>
             <a:endParaRPr lang="en-GB" dirty="0"/>
@@ -6587,7 +6603,7 @@
                   <a:srgbClr val="3A3A3A"/>
                 </a:solidFill>
               </a:rPr>
-              <a:t>This exercise further helps our LLM prompt, and we refine it.</a:t>
+              <a:t>This exercise further helps our LLM app prompt, and we refine it.</a:t>
             </a:r>
             <a:endParaRPr lang="en-GB" sz="3600" dirty="0"/>
           </a:p>
@@ -6607,166 +6623,6 @@
 </file>
 
 <file path=ppt/slides/slide18.xml><?xml version="1.0" encoding="utf-8"?>
-<p:sld xmlns:a="http://schemas.openxmlformats.org/drawingml/2006/main" xmlns:r="http://schemas.openxmlformats.org/officeDocument/2006/relationships" xmlns:p="http://schemas.openxmlformats.org/presentationml/2006/main">
-  <p:cSld>
-    <p:bg>
-      <p:bgPr>
-        <a:solidFill>
-          <a:srgbClr val="FAF0E6"/>
-        </a:solidFill>
-        <a:effectLst/>
-      </p:bgPr>
-    </p:bg>
-    <p:spTree>
-      <p:nvGrpSpPr>
-        <p:cNvPr id="1" name="">
-          <a:extLst>
-            <a:ext uri="{FF2B5EF4-FFF2-40B4-BE49-F238E27FC236}">
-              <a16:creationId xmlns:a16="http://schemas.microsoft.com/office/drawing/2014/main" id="{A6AA3672-075A-71D8-772F-34AEFBC58E65}"/>
-            </a:ext>
-          </a:extLst>
-        </p:cNvPr>
-        <p:cNvGrpSpPr/>
-        <p:nvPr/>
-      </p:nvGrpSpPr>
-      <p:grpSpPr>
-        <a:xfrm>
-          <a:off x="0" y="0"/>
-          <a:ext cx="0" cy="0"/>
-          <a:chOff x="0" y="0"/>
-          <a:chExt cx="0" cy="0"/>
-        </a:xfrm>
-      </p:grpSpPr>
-      <p:sp>
-        <p:nvSpPr>
-          <p:cNvPr id="2" name="Title 1">
-            <a:extLst>
-              <a:ext uri="{FF2B5EF4-FFF2-40B4-BE49-F238E27FC236}">
-                <a16:creationId xmlns:a16="http://schemas.microsoft.com/office/drawing/2014/main" id="{B64261BF-249F-CCD1-63EF-34821F5463FF}"/>
-              </a:ext>
-            </a:extLst>
-          </p:cNvPr>
-          <p:cNvSpPr>
-            <a:spLocks noGrp="1"/>
-          </p:cNvSpPr>
-          <p:nvPr>
-            <p:ph type="title"/>
-          </p:nvPr>
-        </p:nvSpPr>
-        <p:spPr>
-          <a:xfrm>
-            <a:off x="919314" y="190464"/>
-            <a:ext cx="10515600" cy="1325563"/>
-          </a:xfrm>
-        </p:spPr>
-        <p:txBody>
-          <a:bodyPr/>
-          <a:lstStyle/>
-          <a:p>
-            <a:r>
-              <a:rPr lang="en-GB" dirty="0">
-                <a:solidFill>
-                  <a:srgbClr val="676767"/>
-                </a:solidFill>
-              </a:rPr>
-              <a:t>A possible workflow</a:t>
-            </a:r>
-          </a:p>
-        </p:txBody>
-      </p:sp>
-      <p:sp>
-        <p:nvSpPr>
-          <p:cNvPr id="3" name="Content Placeholder 2">
-            <a:extLst>
-              <a:ext uri="{FF2B5EF4-FFF2-40B4-BE49-F238E27FC236}">
-                <a16:creationId xmlns:a16="http://schemas.microsoft.com/office/drawing/2014/main" id="{4D314C5E-A24A-F22D-E158-CFFFB324A8A4}"/>
-              </a:ext>
-            </a:extLst>
-          </p:cNvPr>
-          <p:cNvSpPr>
-            <a:spLocks noGrp="1"/>
-          </p:cNvSpPr>
-          <p:nvPr>
-            <p:ph idx="1"/>
-          </p:nvPr>
-        </p:nvSpPr>
-        <p:spPr>
-          <a:xfrm>
-            <a:off x="838199" y="1413031"/>
-            <a:ext cx="10596715" cy="4906652"/>
-          </a:xfrm>
-          <a:solidFill>
-            <a:srgbClr val="FAF0E6"/>
-          </a:solidFill>
-        </p:spPr>
-        <p:txBody>
-          <a:bodyPr>
-            <a:normAutofit/>
-          </a:bodyPr>
-          <a:lstStyle/>
-          <a:p>
-            <a:pPr marL="0" indent="0">
-              <a:buNone/>
-            </a:pPr>
-            <a:endParaRPr lang="en-GB" dirty="0">
-              <a:solidFill>
-                <a:srgbClr val="3A3A3A"/>
-              </a:solidFill>
-            </a:endParaRPr>
-          </a:p>
-          <a:p>
-            <a:pPr marL="0" indent="0">
-              <a:buNone/>
-            </a:pPr>
-            <a:r>
-              <a:rPr lang="en-GB" sz="3600" dirty="0">
-                <a:solidFill>
-                  <a:srgbClr val="3A3A3A"/>
-                </a:solidFill>
-              </a:rPr>
-              <a:t>We need to draft up guidelines on what an article should contain, its structure and other ways an article is ‘good’.</a:t>
-            </a:r>
-          </a:p>
-          <a:p>
-            <a:pPr marL="0" indent="0">
-              <a:buNone/>
-            </a:pPr>
-            <a:endParaRPr lang="en-GB" sz="3600" dirty="0">
-              <a:solidFill>
-                <a:srgbClr val="3A3A3A"/>
-              </a:solidFill>
-            </a:endParaRPr>
-          </a:p>
-          <a:p>
-            <a:pPr marL="0" indent="0">
-              <a:buNone/>
-            </a:pPr>
-            <a:r>
-              <a:rPr lang="en-GB" sz="3600" dirty="0">
-                <a:solidFill>
-                  <a:srgbClr val="3A3A3A"/>
-                </a:solidFill>
-              </a:rPr>
-              <a:t>This exercise further helps refine our prompt.</a:t>
-            </a:r>
-            <a:endParaRPr lang="en-GB" sz="3600" dirty="0"/>
-          </a:p>
-        </p:txBody>
-      </p:sp>
-    </p:spTree>
-    <p:extLst>
-      <p:ext uri="{BB962C8B-B14F-4D97-AF65-F5344CB8AC3E}">
-        <p14:creationId xmlns:p14="http://schemas.microsoft.com/office/powerpoint/2010/main" val="737341988"/>
-      </p:ext>
-    </p:extLst>
-  </p:cSld>
-  <p:clrMapOvr>
-    <a:masterClrMapping/>
-  </p:clrMapOvr>
-</p:sld>
-</file>
-
-<file path=ppt/slides/slide19.xml><?xml version="1.0" encoding="utf-8"?>
 <p:sld xmlns:a="http://schemas.openxmlformats.org/drawingml/2006/main" xmlns:r="http://schemas.openxmlformats.org/officeDocument/2006/relationships" xmlns:p="http://schemas.openxmlformats.org/presentationml/2006/main">
   <p:cSld>
     <p:bg>
@@ -6861,11 +6717,14 @@
         </p:spPr>
         <p:txBody>
           <a:bodyPr>
-            <a:normAutofit lnSpcReduction="10000"/>
+            <a:normAutofit fontScale="85000" lnSpcReduction="20000"/>
           </a:bodyPr>
           <a:lstStyle/>
           <a:p>
             <a:pPr marL="0" indent="0">
+              <a:lnSpc>
+                <a:spcPts val="3500"/>
+              </a:lnSpc>
               <a:buNone/>
             </a:pPr>
             <a:r>
@@ -6897,7 +6756,7 @@
                   <a:srgbClr val="3A3A3A"/>
                 </a:solidFill>
               </a:rPr>
-              <a:t>With our original prompt and our human evaluator guidelines we write a prompt for this LLM Judge. We can now process a much greater percentage online and  offline.</a:t>
+              <a:t>Seems illogical but is actually very effective.</a:t>
             </a:r>
           </a:p>
           <a:p>
@@ -6912,6 +6771,32 @@
           </a:p>
           <a:p>
             <a:pPr marL="0" indent="0">
+              <a:lnSpc>
+                <a:spcPts val="3500"/>
+              </a:lnSpc>
+              <a:buNone/>
+            </a:pPr>
+            <a:r>
+              <a:rPr lang="en-GB" sz="3600" dirty="0">
+                <a:solidFill>
+                  <a:srgbClr val="3A3A3A"/>
+                </a:solidFill>
+              </a:rPr>
+              <a:t>With our original prompt and our human evaluator guidelines we write a prompt for this LLM Judge. We can now process a much greater percentage online and  offline.</a:t>
+            </a:r>
+          </a:p>
+          <a:p>
+            <a:pPr marL="0" indent="0">
+              <a:buNone/>
+            </a:pPr>
+            <a:endParaRPr lang="en-GB" sz="3600" dirty="0">
+              <a:solidFill>
+                <a:srgbClr val="3A3A3A"/>
+              </a:solidFill>
+            </a:endParaRPr>
+          </a:p>
+          <a:p>
+            <a:pPr marL="0" indent="0">
               <a:buNone/>
             </a:pPr>
             <a:r>
@@ -6930,6 +6815,179 @@
     <p:extLst>
       <p:ext uri="{BB962C8B-B14F-4D97-AF65-F5344CB8AC3E}">
         <p14:creationId xmlns:p14="http://schemas.microsoft.com/office/powerpoint/2010/main" val="2312621687"/>
+      </p:ext>
+    </p:extLst>
+  </p:cSld>
+  <p:clrMapOvr>
+    <a:masterClrMapping/>
+  </p:clrMapOvr>
+</p:sld>
+</file>
+
+<file path=ppt/slides/slide19.xml><?xml version="1.0" encoding="utf-8"?>
+<p:sld xmlns:a="http://schemas.openxmlformats.org/drawingml/2006/main" xmlns:r="http://schemas.openxmlformats.org/officeDocument/2006/relationships" xmlns:p="http://schemas.openxmlformats.org/presentationml/2006/main">
+  <p:cSld>
+    <p:bg>
+      <p:bgPr>
+        <a:solidFill>
+          <a:srgbClr val="FAF0E6"/>
+        </a:solidFill>
+        <a:effectLst/>
+      </p:bgPr>
+    </p:bg>
+    <p:spTree>
+      <p:nvGrpSpPr>
+        <p:cNvPr id="1" name="">
+          <a:extLst>
+            <a:ext uri="{FF2B5EF4-FFF2-40B4-BE49-F238E27FC236}">
+              <a16:creationId xmlns:a16="http://schemas.microsoft.com/office/drawing/2014/main" id="{BBE8893A-DC61-4C1F-F66E-16B9BEF6FEF8}"/>
+            </a:ext>
+          </a:extLst>
+        </p:cNvPr>
+        <p:cNvGrpSpPr/>
+        <p:nvPr/>
+      </p:nvGrpSpPr>
+      <p:grpSpPr>
+        <a:xfrm>
+          <a:off x="0" y="0"/>
+          <a:ext cx="0" cy="0"/>
+          <a:chOff x="0" y="0"/>
+          <a:chExt cx="0" cy="0"/>
+        </a:xfrm>
+      </p:grpSpPr>
+      <p:sp>
+        <p:nvSpPr>
+          <p:cNvPr id="2" name="Title 1">
+            <a:extLst>
+              <a:ext uri="{FF2B5EF4-FFF2-40B4-BE49-F238E27FC236}">
+                <a16:creationId xmlns:a16="http://schemas.microsoft.com/office/drawing/2014/main" id="{8573560D-6E5D-1168-8281-F94F2F5A04BA}"/>
+              </a:ext>
+            </a:extLst>
+          </p:cNvPr>
+          <p:cNvSpPr>
+            <a:spLocks noGrp="1"/>
+          </p:cNvSpPr>
+          <p:nvPr>
+            <p:ph type="title"/>
+          </p:nvPr>
+        </p:nvSpPr>
+        <p:spPr>
+          <a:xfrm>
+            <a:off x="919314" y="190464"/>
+            <a:ext cx="10515600" cy="1325563"/>
+          </a:xfrm>
+        </p:spPr>
+        <p:txBody>
+          <a:bodyPr/>
+          <a:lstStyle/>
+          <a:p>
+            <a:r>
+              <a:rPr lang="en-GB" dirty="0">
+                <a:solidFill>
+                  <a:srgbClr val="676767"/>
+                </a:solidFill>
+              </a:rPr>
+              <a:t>A possible workflow</a:t>
+            </a:r>
+          </a:p>
+        </p:txBody>
+      </p:sp>
+      <p:sp>
+        <p:nvSpPr>
+          <p:cNvPr id="3" name="Content Placeholder 2">
+            <a:extLst>
+              <a:ext uri="{FF2B5EF4-FFF2-40B4-BE49-F238E27FC236}">
+                <a16:creationId xmlns:a16="http://schemas.microsoft.com/office/drawing/2014/main" id="{A6BF4D6B-1CA0-DB9A-FA7F-A5FA83DEBA99}"/>
+              </a:ext>
+            </a:extLst>
+          </p:cNvPr>
+          <p:cNvSpPr>
+            <a:spLocks noGrp="1"/>
+          </p:cNvSpPr>
+          <p:nvPr>
+            <p:ph idx="1"/>
+          </p:nvPr>
+        </p:nvSpPr>
+        <p:spPr>
+          <a:xfrm>
+            <a:off x="838199" y="1413031"/>
+            <a:ext cx="10596715" cy="4906652"/>
+          </a:xfrm>
+          <a:solidFill>
+            <a:srgbClr val="FAF0E6"/>
+          </a:solidFill>
+        </p:spPr>
+        <p:txBody>
+          <a:bodyPr>
+            <a:normAutofit/>
+          </a:bodyPr>
+          <a:lstStyle/>
+          <a:p>
+            <a:pPr marL="0" indent="0">
+              <a:buNone/>
+            </a:pPr>
+            <a:r>
+              <a:rPr lang="en-GB" sz="3600" dirty="0">
+                <a:solidFill>
+                  <a:srgbClr val="3A3A3A"/>
+                </a:solidFill>
+              </a:rPr>
+              <a:t>Now that we are looking at our data, we see that sometimes the app offers financial advice.</a:t>
+            </a:r>
+          </a:p>
+          <a:p>
+            <a:pPr marL="0" indent="0">
+              <a:buNone/>
+            </a:pPr>
+            <a:endParaRPr lang="en-GB" sz="3600" dirty="0">
+              <a:solidFill>
+                <a:srgbClr val="3A3A3A"/>
+              </a:solidFill>
+            </a:endParaRPr>
+          </a:p>
+          <a:p>
+            <a:pPr marL="0" indent="0">
+              <a:buNone/>
+            </a:pPr>
+            <a:r>
+              <a:rPr lang="en-GB" sz="3600" dirty="0">
+                <a:solidFill>
+                  <a:srgbClr val="3A3A3A"/>
+                </a:solidFill>
+              </a:rPr>
+              <a:t>We must prevent this (guardrails) so we create an LLM as Judge that detects if this article had financial advice.</a:t>
+            </a:r>
+          </a:p>
+          <a:p>
+            <a:pPr marL="0" indent="0">
+              <a:buNone/>
+            </a:pPr>
+            <a:endParaRPr lang="en-GB" sz="3600" dirty="0">
+              <a:solidFill>
+                <a:srgbClr val="3A3A3A"/>
+              </a:solidFill>
+            </a:endParaRPr>
+          </a:p>
+          <a:p>
+            <a:pPr marL="0" indent="0">
+              <a:buNone/>
+            </a:pPr>
+            <a:r>
+              <a:rPr lang="en-GB" sz="3600" dirty="0">
+                <a:solidFill>
+                  <a:srgbClr val="3A3A3A"/>
+                </a:solidFill>
+              </a:rPr>
+              <a:t>It saves many problems…</a:t>
+            </a:r>
+            <a:endParaRPr lang="en-GB" sz="3600" dirty="0"/>
+          </a:p>
+        </p:txBody>
+      </p:sp>
+    </p:spTree>
+    <p:extLst>
+      <p:ext uri="{BB962C8B-B14F-4D97-AF65-F5344CB8AC3E}">
+        <p14:creationId xmlns:p14="http://schemas.microsoft.com/office/powerpoint/2010/main" val="2293205134"/>
       </p:ext>
     </p:extLst>
   </p:cSld>
@@ -7106,7 +7164,7 @@
             </a:pPr>
             <a:r>
               <a:rPr lang="en-GB" sz="3600" dirty="0"/>
-              <a:t>There will be some slides and then dive into code and manual (website).</a:t>
+              <a:t>There will be some slides and then we will dive into the code and manual (website).</a:t>
             </a:r>
           </a:p>
           <a:p>
@@ -7134,179 +7192,6 @@
 </file>
 
 <file path=ppt/slides/slide20.xml><?xml version="1.0" encoding="utf-8"?>
-<p:sld xmlns:a="http://schemas.openxmlformats.org/drawingml/2006/main" xmlns:r="http://schemas.openxmlformats.org/officeDocument/2006/relationships" xmlns:p="http://schemas.openxmlformats.org/presentationml/2006/main">
-  <p:cSld>
-    <p:bg>
-      <p:bgPr>
-        <a:solidFill>
-          <a:srgbClr val="FAF0E6"/>
-        </a:solidFill>
-        <a:effectLst/>
-      </p:bgPr>
-    </p:bg>
-    <p:spTree>
-      <p:nvGrpSpPr>
-        <p:cNvPr id="1" name="">
-          <a:extLst>
-            <a:ext uri="{FF2B5EF4-FFF2-40B4-BE49-F238E27FC236}">
-              <a16:creationId xmlns:a16="http://schemas.microsoft.com/office/drawing/2014/main" id="{BBE8893A-DC61-4C1F-F66E-16B9BEF6FEF8}"/>
-            </a:ext>
-          </a:extLst>
-        </p:cNvPr>
-        <p:cNvGrpSpPr/>
-        <p:nvPr/>
-      </p:nvGrpSpPr>
-      <p:grpSpPr>
-        <a:xfrm>
-          <a:off x="0" y="0"/>
-          <a:ext cx="0" cy="0"/>
-          <a:chOff x="0" y="0"/>
-          <a:chExt cx="0" cy="0"/>
-        </a:xfrm>
-      </p:grpSpPr>
-      <p:sp>
-        <p:nvSpPr>
-          <p:cNvPr id="2" name="Title 1">
-            <a:extLst>
-              <a:ext uri="{FF2B5EF4-FFF2-40B4-BE49-F238E27FC236}">
-                <a16:creationId xmlns:a16="http://schemas.microsoft.com/office/drawing/2014/main" id="{8573560D-6E5D-1168-8281-F94F2F5A04BA}"/>
-              </a:ext>
-            </a:extLst>
-          </p:cNvPr>
-          <p:cNvSpPr>
-            <a:spLocks noGrp="1"/>
-          </p:cNvSpPr>
-          <p:nvPr>
-            <p:ph type="title"/>
-          </p:nvPr>
-        </p:nvSpPr>
-        <p:spPr>
-          <a:xfrm>
-            <a:off x="919314" y="190464"/>
-            <a:ext cx="10515600" cy="1325563"/>
-          </a:xfrm>
-        </p:spPr>
-        <p:txBody>
-          <a:bodyPr/>
-          <a:lstStyle/>
-          <a:p>
-            <a:r>
-              <a:rPr lang="en-GB" dirty="0">
-                <a:solidFill>
-                  <a:srgbClr val="676767"/>
-                </a:solidFill>
-              </a:rPr>
-              <a:t>A possible workflow</a:t>
-            </a:r>
-          </a:p>
-        </p:txBody>
-      </p:sp>
-      <p:sp>
-        <p:nvSpPr>
-          <p:cNvPr id="3" name="Content Placeholder 2">
-            <a:extLst>
-              <a:ext uri="{FF2B5EF4-FFF2-40B4-BE49-F238E27FC236}">
-                <a16:creationId xmlns:a16="http://schemas.microsoft.com/office/drawing/2014/main" id="{A6BF4D6B-1CA0-DB9A-FA7F-A5FA83DEBA99}"/>
-              </a:ext>
-            </a:extLst>
-          </p:cNvPr>
-          <p:cNvSpPr>
-            <a:spLocks noGrp="1"/>
-          </p:cNvSpPr>
-          <p:nvPr>
-            <p:ph idx="1"/>
-          </p:nvPr>
-        </p:nvSpPr>
-        <p:spPr>
-          <a:xfrm>
-            <a:off x="838199" y="1413031"/>
-            <a:ext cx="10596715" cy="4906652"/>
-          </a:xfrm>
-          <a:solidFill>
-            <a:srgbClr val="FAF0E6"/>
-          </a:solidFill>
-        </p:spPr>
-        <p:txBody>
-          <a:bodyPr>
-            <a:normAutofit/>
-          </a:bodyPr>
-          <a:lstStyle/>
-          <a:p>
-            <a:pPr marL="0" indent="0">
-              <a:buNone/>
-            </a:pPr>
-            <a:r>
-              <a:rPr lang="en-GB" sz="3600" dirty="0">
-                <a:solidFill>
-                  <a:srgbClr val="3A3A3A"/>
-                </a:solidFill>
-              </a:rPr>
-              <a:t>Now that we are looking at our data, we see that sometimes the app offers financial advice.</a:t>
-            </a:r>
-          </a:p>
-          <a:p>
-            <a:pPr marL="0" indent="0">
-              <a:buNone/>
-            </a:pPr>
-            <a:endParaRPr lang="en-GB" sz="3600" dirty="0">
-              <a:solidFill>
-                <a:srgbClr val="3A3A3A"/>
-              </a:solidFill>
-            </a:endParaRPr>
-          </a:p>
-          <a:p>
-            <a:pPr marL="0" indent="0">
-              <a:buNone/>
-            </a:pPr>
-            <a:r>
-              <a:rPr lang="en-GB" sz="3600" dirty="0">
-                <a:solidFill>
-                  <a:srgbClr val="3A3A3A"/>
-                </a:solidFill>
-              </a:rPr>
-              <a:t>We must prevent this (guardrails) so we create an LLM as Judge that detects if this article had financial advice.</a:t>
-            </a:r>
-          </a:p>
-          <a:p>
-            <a:pPr marL="0" indent="0">
-              <a:buNone/>
-            </a:pPr>
-            <a:endParaRPr lang="en-GB" sz="3600" dirty="0">
-              <a:solidFill>
-                <a:srgbClr val="3A3A3A"/>
-              </a:solidFill>
-            </a:endParaRPr>
-          </a:p>
-          <a:p>
-            <a:pPr marL="0" indent="0">
-              <a:buNone/>
-            </a:pPr>
-            <a:r>
-              <a:rPr lang="en-GB" sz="3600" dirty="0">
-                <a:solidFill>
-                  <a:srgbClr val="3A3A3A"/>
-                </a:solidFill>
-              </a:rPr>
-              <a:t>It saves many problems…</a:t>
-            </a:r>
-            <a:endParaRPr lang="en-GB" sz="3600" dirty="0"/>
-          </a:p>
-        </p:txBody>
-      </p:sp>
-    </p:spTree>
-    <p:extLst>
-      <p:ext uri="{BB962C8B-B14F-4D97-AF65-F5344CB8AC3E}">
-        <p14:creationId xmlns:p14="http://schemas.microsoft.com/office/powerpoint/2010/main" val="2293205134"/>
-      </p:ext>
-    </p:extLst>
-  </p:cSld>
-  <p:clrMapOvr>
-    <a:masterClrMapping/>
-  </p:clrMapOvr>
-</p:sld>
-</file>
-
-<file path=ppt/slides/slide21.xml><?xml version="1.0" encoding="utf-8"?>
 <p:sld xmlns:a="http://schemas.openxmlformats.org/drawingml/2006/main" xmlns:r="http://schemas.openxmlformats.org/officeDocument/2006/relationships" xmlns:p="http://schemas.openxmlformats.org/presentationml/2006/main">
   <p:cSld>
     <p:bg>
@@ -7416,11 +7301,6 @@
               </a:rPr>
               <a:t>Now that we have a robust way of evaluating our app, we can start to tinker:</a:t>
             </a:r>
-          </a:p>
-          <a:p>
-            <a:pPr marL="0" indent="0">
-              <a:buNone/>
-            </a:pPr>
             <a:endParaRPr lang="en-GB" sz="2400" dirty="0">
               <a:solidFill>
                 <a:srgbClr val="3A3A3A"/>
@@ -7464,9 +7344,19 @@
                   <a:srgbClr val="3A3A3A"/>
                 </a:solidFill>
               </a:rPr>
-              <a:t>Offer a client dashboard of filtered metrics to our clients in real time?</a:t>
-            </a:r>
-            <a:endParaRPr lang="en-GB" dirty="0"/>
+              <a:t>Offer a client dashboard of filtered metrics to our clients in real time? They have entrusted us with their business.</a:t>
+            </a:r>
+          </a:p>
+          <a:p>
+            <a:r>
+              <a:rPr lang="en-GB" i="1" dirty="0">
+                <a:solidFill>
+                  <a:srgbClr val="3A3A3A"/>
+                </a:solidFill>
+              </a:rPr>
+              <a:t>Process not tools.</a:t>
+            </a:r>
+            <a:endParaRPr lang="en-GB" i="1" dirty="0"/>
           </a:p>
         </p:txBody>
       </p:sp>
@@ -7483,7 +7373,7 @@
 </p:sld>
 </file>
 
-<file path=ppt/slides/slide22.xml><?xml version="1.0" encoding="utf-8"?>
+<file path=ppt/slides/slide21.xml><?xml version="1.0" encoding="utf-8"?>
 <p:sld xmlns:a="http://schemas.openxmlformats.org/drawingml/2006/main" xmlns:r="http://schemas.openxmlformats.org/officeDocument/2006/relationships" xmlns:p="http://schemas.openxmlformats.org/presentationml/2006/main">
   <p:cSld>
     <p:bg>
@@ -7761,7 +7651,7 @@
 </p:sld>
 </file>
 
-<file path=ppt/slides/slide23.xml><?xml version="1.0" encoding="utf-8"?>
+<file path=ppt/slides/slide22.xml><?xml version="1.0" encoding="utf-8"?>
 <p:sld xmlns:a="http://schemas.openxmlformats.org/drawingml/2006/main" xmlns:r="http://schemas.openxmlformats.org/officeDocument/2006/relationships" xmlns:p="http://schemas.openxmlformats.org/presentationml/2006/main">
   <p:cSld>
     <p:bg>
@@ -7960,7 +7850,7 @@
 </p:sld>
 </file>
 
-<file path=ppt/slides/slide24.xml><?xml version="1.0" encoding="utf-8"?>
+<file path=ppt/slides/slide23.xml><?xml version="1.0" encoding="utf-8"?>
 <p:sld xmlns:a="http://schemas.openxmlformats.org/drawingml/2006/main" xmlns:r="http://schemas.openxmlformats.org/officeDocument/2006/relationships" xmlns:p="http://schemas.openxmlformats.org/presentationml/2006/main">
   <p:cSld>
     <p:bg>
